--- a/artifacts/slides/cloud-sandboxes.pptx
+++ b/artifacts/slides/cloud-sandboxes.pptx
@@ -508,7 +508,7 @@
 Inside a Git repository, its owner is billed; outside a repository, select an approved billable owner.
 Cloud product/SKU budgets are separate from bundled AI-credit budgets.
 The documented preview trial entitlement ended in July 2026; do not assume a current free allowance.
-Stopping execution and deleting a stored snapshot are different lifecycle actions.,Complete assessment: https://github.com/hammadorg93/copilot-runway/blob/main/features/cloud-sandboxes/assessment.md,Presenter runbook: https://github.com/hammadorg93/copilot-runway/blob/main/demos/cloud-sandboxes/README.md,Kit validation: kit-tested. Live feature validation: not-run.,Remote cleanup: Stop the exact cloud session and separately review its stored snapshot. The local reset cannot perform cloud cleanup.,Primary sources:
+Stopping execution and deleting a stored snapshot are different lifecycle actions.,Complete assessment: https://github.com/aj-enns/copilot-runway/blob/main/features/cloud-sandboxes/assessment.md,Presenter runbook: https://github.com/aj-enns/copilot-runway/blob/main/demos/cloud-sandboxes/README.md,Kit validation: kit-tested. Live feature validation: not-run.,Remote cleanup: Stop the exact cloud session and separately review its stored snapshot. The local reset cannot perform cloud cleanup.,Primary sources:
 About cloud and local sandboxes for GitHub Copilot: https://docs.github.com/en/copilot/concepts/security-governance-and-network-settings/about-cloud-and-local-sandboxes
 Billing for cloud and local sandboxes for GitHub Copilot: https://docs.github.com/en/billing/concepts/product-billing/cloud-and-local-sandboxes
 Usage-based billing for organizations and enterprises: https://docs.github.com/en/copilot/concepts/billing-and-usage/organizations-and-enterprises/billing
@@ -605,7 +605,7 @@
 Inside a Git repository, its owner is billed; outside a repository, select an approved billable owner.
 Cloud product/SKU budgets are separate from bundled AI-credit budgets.
 The documented preview trial entitlement ended in July 2026; do not assume a current free allowance.
-Stopping execution and deleting a stored snapshot are different lifecycle actions.,Complete assessment: https://github.com/hammadorg93/copilot-runway/blob/main/features/cloud-sandboxes/assessment.md,Presenter runbook: https://github.com/hammadorg93/copilot-runway/blob/main/demos/cloud-sandboxes/README.md,Kit validation: kit-tested. Live feature validation: not-run.,Remote cleanup: Stop the exact cloud session and separately review its stored snapshot. The local reset cannot perform cloud cleanup.,Primary sources:
+Stopping execution and deleting a stored snapshot are different lifecycle actions.,Complete assessment: https://github.com/aj-enns/copilot-runway/blob/main/features/cloud-sandboxes/assessment.md,Presenter runbook: https://github.com/aj-enns/copilot-runway/blob/main/demos/cloud-sandboxes/README.md,Kit validation: kit-tested. Live feature validation: not-run.,Remote cleanup: Stop the exact cloud session and separately review its stored snapshot. The local reset cannot perform cloud cleanup.,Primary sources:
 About cloud and local sandboxes for GitHub Copilot: https://docs.github.com/en/copilot/concepts/security-governance-and-network-settings/about-cloud-and-local-sandboxes
 Billing for cloud and local sandboxes for GitHub Copilot: https://docs.github.com/en/billing/concepts/product-billing/cloud-and-local-sandboxes
 Usage-based billing for organizations and enterprises: https://docs.github.com/en/copilot/concepts/billing-and-usage/organizations-and-enterprises/billing

--- a/artifacts/slides/cloud-sandboxes.pptx
+++ b/artifacts/slides/cloud-sandboxes.pptx
@@ -2322,13 +2322,13 @@
             <a:r>
               <a:rPr lang="en-US" sz="3000" b="1" dirty="0">
                 <a:solidFill>
-                  <a:srgbClr val="B11F4B"/>
-                </a:solidFill>
-                <a:latin typeface="Aptos" pitchFamily="34" charset="0"/>
-                <a:ea typeface="Aptos" pitchFamily="34" charset="-122"/>
-                <a:cs typeface="Aptos" pitchFamily="34" charset="-120"/>
-              </a:rPr>
-              <a:t>Pilot with conditions</a:t>
+                  <a:srgbClr val="B91C1C"/>
+                </a:solidFill>
+                <a:latin typeface="Aptos" pitchFamily="34" charset="0"/>
+                <a:ea typeface="Aptos" pitchFamily="34" charset="-122"/>
+                <a:cs typeface="Aptos" pitchFamily="34" charset="-120"/>
+              </a:rPr>
+              <a:t>Hold for evidence</a:t>
             </a:r>
             <a:endParaRPr lang="en-US" sz="3000" dirty="0"/>
           </a:p>
